--- a/dist/초4/수학/자료와규칙/초4_수학_자료와규칙_03_계산식의규칙.pptx
+++ b/dist/초4/수학/자료와규칙/초4_수학_자료와규칙_03_계산식의규칙.pptx
@@ -120,20 +120,20 @@
   <p:extLst>
     <p:ext uri="{521415D9-36F7-43E2-AB2F-B90AF26B5E84}">
       <p14:sectionLst xmlns:p14="http://schemas.microsoft.com/office/powerpoint/2010/main">
-        <p14:section name="도입" id="{451b8a8c-fcb1-484f-8412-32ae56fc5eb7}">
+        <p14:section name="도입" id="{5713f6a9-faef-a7ee-8872-f5ec9b8b76ba}">
           <p14:sldIdLst>
             <p14:sldId id="256"/>
             <p14:sldId id="257"/>
           </p14:sldIdLst>
         </p14:section>
-        <p14:section name="개념" id="{a297a579-3d4b-8e95-698d-9dedacd5cac8}">
+        <p14:section name="개념" id="{5aaa8b96-ea34-6c97-2fd0-b7ce972e6a06}">
           <p14:sldIdLst>
             <p14:sldId id="258"/>
             <p14:sldId id="260"/>
             <p14:sldId id="261"/>
           </p14:sldIdLst>
         </p14:section>
-        <p14:section name="연습" id="{713463a7-42b4-c058-4835-d4c54c35fd66}">
+        <p14:section name="연습" id="{e8768d64-2def-24a4-f237-3adeeb3e569d}">
           <p14:sldIdLst>
             <p14:sldId id="259"/>
             <p14:sldId id="262"/>
@@ -141,25 +141,25 @@
             <p14:sldId id="264"/>
           </p14:sldIdLst>
         </p14:section>
-        <p14:section name="개념" id="{eb364527-d498-1d50-0a68-b7d946bb6e8a}">
+        <p14:section name="개념" id="{26bd05e8-dd5e-fd69-b9b7-d000264dcb75}">
           <p14:sldIdLst/>
         </p14:section>
-        <p14:section name="연습" id="{40b736b3-b7b7-49bf-3d31-694548c32527}">
+        <p14:section name="연습" id="{f7ae2a41-e6f1-2adb-df5a-a71c6a374f91}">
           <p14:sldIdLst/>
         </p14:section>
-        <p14:section name="확인" id="{7b399824-8d56-78b3-44d3-ea9e24fcfd1b}">
+        <p14:section name="확인" id="{10a9dbd8-b51f-68b3-e5ef-5b5c20bf9753}">
           <p14:sldIdLst>
             <p14:sldId id="265"/>
             <p14:sldId id="266"/>
             <p14:sldId id="267"/>
           </p14:sldIdLst>
         </p14:section>
-        <p14:section name="정리" id="{fee9acc5-bbf1-0a44-e2f9-bd21f251fc94}">
+        <p14:section name="정리" id="{30e3c5b2-db36-0b14-14b2-97381f5956a0}">
           <p14:sldIdLst>
             <p14:sldId id="268"/>
           </p14:sldIdLst>
         </p14:section>
-        <p14:section name="보충" id="{d9f8eda2-08cc-c015-1afd-75c04451ab5d}">
+        <p14:section name="보충" id="{59b39e51-7d72-363d-ae41-ae01a0f0249d}">
           <p14:sldIdLst>
             <p14:sldId id="269"/>
           </p14:sldIdLst>
